--- a/sae_captioning_project/presentation/SAE_Gender_Bias_Supervisor_Presentation.pptx
+++ b/sae_captioning_project/presentation/SAE_Gender_Bias_Supervisor_Presentation.pptx
@@ -12125,7 +12125,7 @@
               </a:defRPr>
             </a:pPr>
             <a:r>
-              <a:t>Qualitative Examples (Clean Cross-Lingual Table)</a:t>
+              <a:t>Qualitative Examples (Cross-Lingual)</a:t>
             </a:r>
           </a:p>
         </p:txBody>
@@ -12138,7 +12138,7 @@
         </p:nvSpPr>
         <p:spPr>
           <a:xfrm>
-            <a:off x="274320" y="1097280"/>
+            <a:off x="274320" y="1051560"/>
             <a:ext cx="8595360" cy="320040"/>
           </a:xfrm>
           <a:prstGeom prst="rect">
@@ -12153,14 +12153,14 @@
           <a:lstStyle/>
           <a:p>
             <a:pPr>
-              <a:defRPr sz="1400" i="1">
-                <a:solidFill>
-                  <a:srgbClr val="1F2937"/>
-                </a:solidFill>
-              </a:defRPr>
-            </a:pPr>
-            <a:r>
-              <a:t>Configuration format: [Prompt Language] → [Caption Language]; Arabic shown as transliteration</a:t>
+              <a:defRPr sz="1300" i="1">
+                <a:solidFill>
+                  <a:srgbClr val="1F2937"/>
+                </a:solidFill>
+              </a:defRPr>
+            </a:pPr>
+            <a:r>
+              <a:t>Configuration format: [Prompt Language] → [Caption Language]; Arabic shown in script</a:t>
             </a:r>
           </a:p>
         </p:txBody>
@@ -12175,7 +12175,7 @@
         </p:nvGraphicFramePr>
         <p:xfrm>
           <a:off x="182880" y="1463040"/>
-          <a:ext cx="8778238" cy="1645920"/>
+          <a:ext cx="8778237" cy="4828032"/>
         </p:xfrm>
         <a:graphic>
           <a:graphicData uri="http://schemas.openxmlformats.org/drawingml/2006/table">
@@ -12184,29 +12184,29 @@
                 <a:tableStyleId>{5C22544A-7EE6-4342-B048-85BDC9FD1C3A}</a:tableStyleId>
               </a:tblPr>
               <a:tblGrid>
-                <a:gridCol w="1254034"/>
-                <a:gridCol w="1254034"/>
-                <a:gridCol w="1254034"/>
-                <a:gridCol w="1254034"/>
-                <a:gridCol w="1254034"/>
-                <a:gridCol w="1254034"/>
-                <a:gridCol w="1254034"/>
+                <a:gridCol w="1353857"/>
+                <a:gridCol w="1179166"/>
+                <a:gridCol w="1266512"/>
+                <a:gridCol w="1266512"/>
+                <a:gridCol w="1266512"/>
+                <a:gridCol w="1266512"/>
+                <a:gridCol w="1179166"/>
               </a:tblGrid>
-              <a:tr h="411480">
-                <a:tc>
-                  <a:txBody>
-                    <a:bodyPr/>
-                    <a:lstStyle/>
-                    <a:p>
-                      <a:pPr algn="ctr">
-                        <a:defRPr sz="1300" b="1">
+              <a:tr h="384048">
+                <a:tc>
+                  <a:txBody>
+                    <a:bodyPr/>
+                    <a:lstStyle/>
+                    <a:p>
+                      <a:pPr algn="ctr">
+                        <a:defRPr sz="1200" b="1">
                           <a:solidFill>
                             <a:srgbClr val="FFFFFF"/>
                           </a:solidFill>
                         </a:defRPr>
                       </a:pPr>
                       <a:r>
-                        <a:t>Image Context</a:t>
+                        <a:t>Image</a:t>
                       </a:r>
                     </a:p>
                   </a:txBody>
@@ -12222,7 +12222,7 @@
                     <a:lstStyle/>
                     <a:p>
                       <a:pPr algn="ctr">
-                        <a:defRPr sz="1300" b="1">
+                        <a:defRPr sz="1200" b="1">
                           <a:solidFill>
                             <a:srgbClr val="FFFFFF"/>
                           </a:solidFill>
@@ -12245,7 +12245,7 @@
                     <a:lstStyle/>
                     <a:p>
                       <a:pPr algn="ctr">
-                        <a:defRPr sz="1300" b="1">
+                        <a:defRPr sz="1200" b="1">
                           <a:solidFill>
                             <a:srgbClr val="FFFFFF"/>
                           </a:solidFill>
@@ -12268,7 +12268,7 @@
                     <a:lstStyle/>
                     <a:p>
                       <a:pPr algn="ctr">
-                        <a:defRPr sz="1300" b="1">
+                        <a:defRPr sz="1200" b="1">
                           <a:solidFill>
                             <a:srgbClr val="FFFFFF"/>
                           </a:solidFill>
@@ -12291,7 +12291,7 @@
                     <a:lstStyle/>
                     <a:p>
                       <a:pPr algn="ctr">
-                        <a:defRPr sz="1300" b="1">
+                        <a:defRPr sz="1200" b="1">
                           <a:solidFill>
                             <a:srgbClr val="FFFFFF"/>
                           </a:solidFill>
@@ -12314,7 +12314,7 @@
                     <a:lstStyle/>
                     <a:p>
                       <a:pPr algn="ctr">
-                        <a:defRPr sz="1300" b="1">
+                        <a:defRPr sz="1200" b="1">
                           <a:solidFill>
                             <a:srgbClr val="FFFFFF"/>
                           </a:solidFill>
@@ -12337,7 +12337,7 @@
                     <a:lstStyle/>
                     <a:p>
                       <a:pPr algn="ctr">
-                        <a:defRPr sz="1300" b="1">
+                        <a:defRPr sz="1200" b="1">
                           <a:solidFill>
                             <a:srgbClr val="FFFFFF"/>
                           </a:solidFill>
@@ -12355,22 +12355,19 @@
                   </a:tcPr>
                 </a:tc>
               </a:tr>
-              <a:tr h="411480">
-                <a:tc>
-                  <a:txBody>
-                    <a:bodyPr/>
-                    <a:lstStyle/>
-                    <a:p>
-                      <a:pPr algn="ctr">
-                        <a:defRPr sz="1200">
+              <a:tr h="1481328">
+                <a:tc>
+                  <a:txBody>
+                    <a:bodyPr wrap="square"/>
+                    <a:lstStyle/>
+                    <a:p>
+                      <a:pPr algn="ctr">
+                        <a:defRPr sz="1000">
                           <a:solidFill>
                             <a:srgbClr val="1F2937"/>
                           </a:solidFill>
                         </a:defRPr>
                       </a:pPr>
-                      <a:r>
-                        <a:t>Tennis player</a:t>
-                      </a:r>
                     </a:p>
                   </a:txBody>
                   <a:tcPr>
@@ -12381,11 +12378,11 @@
                 </a:tc>
                 <a:tc>
                   <a:txBody>
-                    <a:bodyPr/>
-                    <a:lstStyle/>
-                    <a:p>
-                      <a:pPr algn="ctr">
-                        <a:defRPr sz="1200">
+                    <a:bodyPr wrap="square"/>
+                    <a:lstStyle/>
+                    <a:p>
+                      <a:pPr algn="ctr">
+                        <a:defRPr sz="1000">
                           <a:solidFill>
                             <a:srgbClr val="1F2937"/>
                           </a:solidFill>
@@ -12404,11 +12401,11 @@
                 </a:tc>
                 <a:tc>
                   <a:txBody>
-                    <a:bodyPr/>
-                    <a:lstStyle/>
-                    <a:p>
-                      <a:pPr algn="ctr">
-                        <a:defRPr sz="1200">
+                    <a:bodyPr wrap="square"/>
+                    <a:lstStyle/>
+                    <a:p>
+                      <a:pPr algn="ctr">
+                        <a:defRPr sz="1000">
                           <a:solidFill>
                             <a:srgbClr val="1F2937"/>
                           </a:solidFill>
@@ -12427,18 +12424,18 @@
                 </a:tc>
                 <a:tc>
                   <a:txBody>
-                    <a:bodyPr/>
-                    <a:lstStyle/>
-                    <a:p>
-                      <a:pPr algn="ctr">
-                        <a:defRPr sz="1200">
+                    <a:bodyPr wrap="square"/>
+                    <a:lstStyle/>
+                    <a:p>
+                      <a:pPr algn="ctr">
+                        <a:defRPr sz="1000">
                           <a:solidFill>
                             <a:srgbClr val="1F2937"/>
                           </a:solidFill>
                         </a:defRPr>
                       </a:pPr>
                       <a:r>
-                        <a:t>'la'iba ...' → 'imra'a ...'</a:t>
+                        <a:t>'لاعبة ...' → 'امرأة ...'</a:t>
                       </a:r>
                     </a:p>
                   </a:txBody>
@@ -12450,11 +12447,11 @@
                 </a:tc>
                 <a:tc>
                   <a:txBody>
-                    <a:bodyPr/>
-                    <a:lstStyle/>
-                    <a:p>
-                      <a:pPr algn="ctr">
-                        <a:defRPr sz="1200">
+                    <a:bodyPr wrap="square"/>
+                    <a:lstStyle/>
+                    <a:p>
+                      <a:pPr algn="ctr">
+                        <a:defRPr sz="1000">
                           <a:solidFill>
                             <a:srgbClr val="1F2937"/>
                           </a:solidFill>
@@ -12473,18 +12470,18 @@
                 </a:tc>
                 <a:tc>
                   <a:txBody>
-                    <a:bodyPr/>
-                    <a:lstStyle/>
-                    <a:p>
-                      <a:pPr algn="ctr">
-                        <a:defRPr sz="1200">
+                    <a:bodyPr wrap="square"/>
+                    <a:lstStyle/>
+                    <a:p>
+                      <a:pPr algn="ctr">
+                        <a:defRPr sz="1000">
                           <a:solidFill>
                             <a:srgbClr val="1F2937"/>
                           </a:solidFill>
                         </a:defRPr>
                       </a:pPr>
                       <a:r>
-                        <a:t>'nara imra'a tal'ab ...'</a:t>
+                        <a:t>'في الصورة نرى امرأة ...'</a:t>
                       </a:r>
                     </a:p>
                   </a:txBody>
@@ -12496,11 +12493,11 @@
                 </a:tc>
                 <a:tc>
                   <a:txBody>
-                    <a:bodyPr/>
-                    <a:lstStyle/>
-                    <a:p>
-                      <a:pPr algn="ctr">
-                        <a:defRPr sz="1200">
+                    <a:bodyPr wrap="square"/>
+                    <a:lstStyle/>
+                    <a:p>
+                      <a:pPr algn="ctr">
+                        <a:defRPr sz="1000">
                           <a:solidFill>
                             <a:srgbClr val="1F2937"/>
                           </a:solidFill>
@@ -12518,33 +12515,30 @@
                   </a:tcPr>
                 </a:tc>
               </a:tr>
-              <a:tr h="411480">
-                <a:tc>
-                  <a:txBody>
-                    <a:bodyPr/>
-                    <a:lstStyle/>
-                    <a:p>
-                      <a:pPr algn="ctr">
-                        <a:defRPr sz="1200">
+              <a:tr h="1481328">
+                <a:tc>
+                  <a:txBody>
+                    <a:bodyPr wrap="square"/>
+                    <a:lstStyle/>
+                    <a:p>
+                      <a:pPr algn="ctr">
+                        <a:defRPr sz="1000">
                           <a:solidFill>
                             <a:srgbClr val="1F2937"/>
                           </a:solidFill>
                         </a:defRPr>
                       </a:pPr>
-                      <a:r>
-                        <a:t>Wheelchair street scene</a:t>
-                      </a:r>
                     </a:p>
                   </a:txBody>
                   <a:tcPr/>
                 </a:tc>
                 <a:tc>
                   <a:txBody>
-                    <a:bodyPr/>
-                    <a:lstStyle/>
-                    <a:p>
-                      <a:pPr algn="ctr">
-                        <a:defRPr sz="1200">
+                    <a:bodyPr wrap="square"/>
+                    <a:lstStyle/>
+                    <a:p>
+                      <a:pPr algn="ctr">
+                        <a:defRPr sz="1000">
                           <a:solidFill>
                             <a:srgbClr val="1F2937"/>
                           </a:solidFill>
@@ -12559,11 +12553,11 @@
                 </a:tc>
                 <a:tc>
                   <a:txBody>
-                    <a:bodyPr/>
-                    <a:lstStyle/>
-                    <a:p>
-                      <a:pPr algn="ctr">
-                        <a:defRPr sz="1200">
+                    <a:bodyPr wrap="square"/>
+                    <a:lstStyle/>
+                    <a:p>
+                      <a:pPr algn="ctr">
+                        <a:defRPr sz="1000">
                           <a:solidFill>
                             <a:srgbClr val="1F2937"/>
                           </a:solidFill>
@@ -12578,18 +12572,18 @@
                 </a:tc>
                 <a:tc>
                   <a:txBody>
-                    <a:bodyPr/>
-                    <a:lstStyle/>
-                    <a:p>
-                      <a:pPr algn="ctr">
-                        <a:defRPr sz="1200">
+                    <a:bodyPr wrap="square"/>
+                    <a:lstStyle/>
+                    <a:p>
+                      <a:pPr algn="ctr">
+                        <a:defRPr sz="1000">
                           <a:solidFill>
                             <a:srgbClr val="1F2937"/>
                           </a:solidFill>
                         </a:defRPr>
                       </a:pPr>
                       <a:r>
-                        <a:t>More explicit 'rajul' usage</a:t>
+                        <a:t>More explicit 'رجل' usage</a:t>
                       </a:r>
                     </a:p>
                   </a:txBody>
@@ -12597,11 +12591,11 @@
                 </a:tc>
                 <a:tc>
                   <a:txBody>
-                    <a:bodyPr/>
-                    <a:lstStyle/>
-                    <a:p>
-                      <a:pPr algn="ctr">
-                        <a:defRPr sz="1200">
+                    <a:bodyPr wrap="square"/>
+                    <a:lstStyle/>
+                    <a:p>
+                      <a:pPr algn="ctr">
+                        <a:defRPr sz="1000">
                           <a:solidFill>
                             <a:srgbClr val="1F2937"/>
                           </a:solidFill>
@@ -12616,11 +12610,11 @@
                 </a:tc>
                 <a:tc>
                   <a:txBody>
-                    <a:bodyPr/>
-                    <a:lstStyle/>
-                    <a:p>
-                      <a:pPr algn="ctr">
-                        <a:defRPr sz="1200">
+                    <a:bodyPr wrap="square"/>
+                    <a:lstStyle/>
+                    <a:p>
+                      <a:pPr algn="ctr">
+                        <a:defRPr sz="1000">
                           <a:solidFill>
                             <a:srgbClr val="1F2937"/>
                           </a:solidFill>
@@ -12635,11 +12629,11 @@
                 </a:tc>
                 <a:tc>
                   <a:txBody>
-                    <a:bodyPr/>
-                    <a:lstStyle/>
-                    <a:p>
-                      <a:pPr algn="ctr">
-                        <a:defRPr sz="1200">
+                    <a:bodyPr wrap="square"/>
+                    <a:lstStyle/>
+                    <a:p>
+                      <a:pPr algn="ctr">
+                        <a:defRPr sz="1000">
                           <a:solidFill>
                             <a:srgbClr val="1F2937"/>
                           </a:solidFill>
@@ -12653,22 +12647,19 @@
                   <a:tcPr/>
                 </a:tc>
               </a:tr>
-              <a:tr h="411480">
-                <a:tc>
-                  <a:txBody>
-                    <a:bodyPr/>
-                    <a:lstStyle/>
-                    <a:p>
-                      <a:pPr algn="ctr">
-                        <a:defRPr sz="1200">
+              <a:tr h="1481328">
+                <a:tc>
+                  <a:txBody>
+                    <a:bodyPr wrap="square"/>
+                    <a:lstStyle/>
+                    <a:p>
+                      <a:pPr algn="ctr">
+                        <a:defRPr sz="1000">
                           <a:solidFill>
                             <a:srgbClr val="1F2937"/>
                           </a:solidFill>
                         </a:defRPr>
                       </a:pPr>
-                      <a:r>
-                        <a:t>Cyclist in forest</a:t>
-                      </a:r>
                     </a:p>
                   </a:txBody>
                   <a:tcPr>
@@ -12679,11 +12670,11 @@
                 </a:tc>
                 <a:tc>
                   <a:txBody>
-                    <a:bodyPr/>
-                    <a:lstStyle/>
-                    <a:p>
-                      <a:pPr algn="ctr">
-                        <a:defRPr sz="1200">
+                    <a:bodyPr wrap="square"/>
+                    <a:lstStyle/>
+                    <a:p>
+                      <a:pPr algn="ctr">
+                        <a:defRPr sz="1000">
                           <a:solidFill>
                             <a:srgbClr val="1F2937"/>
                           </a:solidFill>
@@ -12702,11 +12693,11 @@
                 </a:tc>
                 <a:tc>
                   <a:txBody>
-                    <a:bodyPr/>
-                    <a:lstStyle/>
-                    <a:p>
-                      <a:pPr algn="ctr">
-                        <a:defRPr sz="1200">
+                    <a:bodyPr wrap="square"/>
+                    <a:lstStyle/>
+                    <a:p>
+                      <a:pPr algn="ctr">
+                        <a:defRPr sz="1000">
                           <a:solidFill>
                             <a:srgbClr val="1F2937"/>
                           </a:solidFill>
@@ -12725,18 +12716,18 @@
                 </a:tc>
                 <a:tc>
                   <a:txBody>
-                    <a:bodyPr/>
-                    <a:lstStyle/>
-                    <a:p>
-                      <a:pPr algn="ctr">
-                        <a:defRPr sz="1200">
+                    <a:bodyPr wrap="square"/>
+                    <a:lstStyle/>
+                    <a:p>
+                      <a:pPr algn="ctr">
+                        <a:defRPr sz="1000">
                           <a:solidFill>
                             <a:srgbClr val="1F2937"/>
                           </a:solidFill>
                         </a:defRPr>
                       </a:pPr>
                       <a:r>
-                        <a:t>Gender-marked Arabic nouns</a:t>
+                        <a:t>Gender-marked nouns ('راكب دراجة' etc.)</a:t>
                       </a:r>
                     </a:p>
                   </a:txBody>
@@ -12748,11 +12739,11 @@
                 </a:tc>
                 <a:tc>
                   <a:txBody>
-                    <a:bodyPr/>
-                    <a:lstStyle/>
-                    <a:p>
-                      <a:pPr algn="ctr">
-                        <a:defRPr sz="1200">
+                    <a:bodyPr wrap="square"/>
+                    <a:lstStyle/>
+                    <a:p>
+                      <a:pPr algn="ctr">
+                        <a:defRPr sz="1000">
                           <a:solidFill>
                             <a:srgbClr val="1F2937"/>
                           </a:solidFill>
@@ -12771,11 +12762,11 @@
                 </a:tc>
                 <a:tc>
                   <a:txBody>
-                    <a:bodyPr/>
-                    <a:lstStyle/>
-                    <a:p>
-                      <a:pPr algn="ctr">
-                        <a:defRPr sz="1200">
+                    <a:bodyPr wrap="square"/>
+                    <a:lstStyle/>
+                    <a:p>
+                      <a:pPr algn="ctr">
+                        <a:defRPr sz="1000">
                           <a:solidFill>
                             <a:srgbClr val="1F2937"/>
                           </a:solidFill>
@@ -12794,11 +12785,11 @@
                 </a:tc>
                 <a:tc>
                   <a:txBody>
-                    <a:bodyPr/>
-                    <a:lstStyle/>
-                    <a:p>
-                      <a:pPr algn="ctr">
-                        <a:defRPr sz="1200">
+                    <a:bodyPr wrap="square"/>
+                    <a:lstStyle/>
+                    <a:p>
+                      <a:pPr algn="ctr">
+                        <a:defRPr sz="1000">
                           <a:solidFill>
                             <a:srgbClr val="1F2937"/>
                           </a:solidFill>
@@ -12820,6 +12811,78 @@
           </a:graphicData>
         </a:graphic>
       </p:graphicFrame>
+      <p:pic>
+        <p:nvPicPr>
+          <p:cNvPr id="6" name="Picture 5" descr="img_tennis.jpg"/>
+          <p:cNvPicPr>
+            <a:picLocks noChangeAspect="1"/>
+          </p:cNvPicPr>
+          <p:nvPr/>
+        </p:nvPicPr>
+        <p:blipFill>
+          <a:blip r:embed="rId2"/>
+          <a:stretch>
+            <a:fillRect/>
+          </a:stretch>
+        </p:blipFill>
+        <p:spPr>
+          <a:xfrm>
+            <a:off x="219456" y="1920240"/>
+            <a:ext cx="1335024" cy="1335024"/>
+          </a:xfrm>
+          <a:prstGeom prst="rect">
+            <a:avLst/>
+          </a:prstGeom>
+        </p:spPr>
+      </p:pic>
+      <p:pic>
+        <p:nvPicPr>
+          <p:cNvPr id="7" name="Picture 6" descr="img_wheelchair.jpg"/>
+          <p:cNvPicPr>
+            <a:picLocks noChangeAspect="1"/>
+          </p:cNvPicPr>
+          <p:nvPr/>
+        </p:nvPicPr>
+        <p:blipFill>
+          <a:blip r:embed="rId3"/>
+          <a:stretch>
+            <a:fillRect/>
+          </a:stretch>
+        </p:blipFill>
+        <p:spPr>
+          <a:xfrm>
+            <a:off x="219456" y="3401568"/>
+            <a:ext cx="1335024" cy="1335024"/>
+          </a:xfrm>
+          <a:prstGeom prst="rect">
+            <a:avLst/>
+          </a:prstGeom>
+        </p:spPr>
+      </p:pic>
+      <p:pic>
+        <p:nvPicPr>
+          <p:cNvPr id="8" name="Picture 7" descr="img_cyclist.jpg"/>
+          <p:cNvPicPr>
+            <a:picLocks noChangeAspect="1"/>
+          </p:cNvPicPr>
+          <p:nvPr/>
+        </p:nvPicPr>
+        <p:blipFill>
+          <a:blip r:embed="rId4"/>
+          <a:stretch>
+            <a:fillRect/>
+          </a:stretch>
+        </p:blipFill>
+        <p:spPr>
+          <a:xfrm>
+            <a:off x="219456" y="4882896"/>
+            <a:ext cx="1335024" cy="1335024"/>
+          </a:xfrm>
+          <a:prstGeom prst="rect">
+            <a:avLst/>
+          </a:prstGeom>
+        </p:spPr>
+      </p:pic>
     </p:spTree>
   </p:cSld>
   <p:clrMapOvr>
